--- a/it/slides/24-Architettura_dei_Calcolatori-Superscalari_HPC_GPU_FPGA-Lab.pptx
+++ b/it/slides/24-Architettura_dei_Calcolatori-Superscalari_HPC_GPU_FPGA-Lab.pptx
@@ -127,45 +127,45 @@
   <p:extLst>
     <p:ext uri="{521415D9-36F7-43E2-AB2F-B90AF26B5E84}">
       <p14:sectionLst xmlns:p14="http://schemas.microsoft.com/office/powerpoint/2010/main">
-        <p14:section name="Apertura" id="{4a1d0ca7-9f81-942c-02ee-26a92809920c}">
+        <p14:section name="Apertura" id="{adf82914-9d11-f830-7e80-c9e30ecffc4b}">
           <p14:sldIdLst>
             <p14:sldId id="256"/>
             <p14:sldId id="257"/>
           </p14:sldIdLst>
         </p14:section>
-        <p14:section name="Riscaldamento sulla macchina" id="{5673d691-30be-7763-78f3-7ca36ae060bf}">
+        <p14:section name="Riscaldamento sulla macchina" id="{6799ff4a-8513-5671-0601-edb2431885fc}">
           <p14:sldIdLst>
             <p14:sldId id="258"/>
           </p14:sldIdLst>
         </p14:section>
-        <p14:section name="Processori superscalari" id="{4b2c61fd-406a-1c08-9f83-9fcd6cfe1904}">
+        <p14:section name="Processori superscalari" id="{b15cc0fc-e92e-3c3e-b4b3-5b48553179a2}">
           <p14:sldIdLst>
             <p14:sldId id="259"/>
             <p14:sldId id="260"/>
           </p14:sldIdLst>
         </p14:section>
-        <p14:section name="Vettori: un'istruzione, molti dati" id="{a2c29cb1-1769-0704-a84a-96e380bd7c8e}">
+        <p14:section name="Vettori: un'istruzione, molti dati" id="{4e4e8b0a-1a53-bdd3-47b5-4af5833b03b6}">
           <p14:sldIdLst>
             <p14:sldId id="261"/>
             <p14:sldId id="262"/>
           </p14:sldIdLst>
         </p14:section>
-        <p14:section name="Acceleratori GPU" id="{9ecd375d-75e6-cbe9-0e8c-23067c5844c3}">
+        <p14:section name="Acceleratori GPU" id="{07c8066c-dbba-5011-f484-69af17887553}">
           <p14:sldIdLst>
             <p14:sldId id="263"/>
           </p14:sldIdLst>
         </p14:section>
-        <p14:section name="Acceleratori FPGA" id="{7d3b4df2-2a74-c038-5c94-20f6709b62c7}">
+        <p14:section name="Acceleratori FPGA" id="{333a6a4d-2665-72bb-6ca7-b9275299490b}">
           <p14:sldIdLst>
             <p14:sldId id="264"/>
           </p14:sldIdLst>
         </p14:section>
-        <p14:section name="Ritorno alla macchina" id="{85cf3a05-0c8b-4ef4-74dc-a9b65c100905}">
+        <p14:section name="Ritorno alla macchina" id="{bd481760-cc82-fa61-b492-558893f73f5c}">
           <p14:sldIdLst>
             <p14:sldId id="265"/>
           </p14:sldIdLst>
         </p14:section>
-        <p14:section name="Il programma completo" id="{55f92149-114a-2bb9-6ef9-dd362d3ee924}">
+        <p14:section name="Il programma completo" id="{77c499fe-aa8a-742f-23b9-b56060e8fdbb}">
           <p14:sldIdLst>
             <p14:sldId id="266"/>
             <p14:sldId id="267"/>
@@ -173,7 +173,7 @@
             <p14:sldId id="269"/>
           </p14:sldIdLst>
         </p14:section>
-        <p14:section name="Eseguire e provare" id="{ba1b5544-fc97-2bc9-cc29-a4e9c53e280c}">
+        <p14:section name="Eseguire e provare" id="{f64f3bc6-1155-f388-d6ac-7a7414954cdc}">
           <p14:sldIdLst>
             <p14:sldId id="270"/>
             <p14:sldId id="271"/>
@@ -183,7 +183,7 @@
             <p14:sldId id="275"/>
           </p14:sldIdLst>
         </p14:section>
-        <p14:section name="Esercizi" id="{aeeb3026-0f49-eb39-056f-450cf2c3e6e5}">
+        <p14:section name="Esercizi" id="{a2343900-0a5f-e989-9ef8-4b15c139f912}">
           <p14:sldIdLst>
             <p14:sldId id="276"/>
           </p14:sldIdLst>

--- a/it/slides/24-Architettura_dei_Calcolatori-Superscalari_HPC_GPU_FPGA-Lab.pptx
+++ b/it/slides/24-Architettura_dei_Calcolatori-Superscalari_HPC_GPU_FPGA-Lab.pptx
@@ -127,45 +127,45 @@
   <p:extLst>
     <p:ext uri="{521415D9-36F7-43E2-AB2F-B90AF26B5E84}">
       <p14:sectionLst xmlns:p14="http://schemas.microsoft.com/office/powerpoint/2010/main">
-        <p14:section name="Apertura" id="{adf82914-9d11-f830-7e80-c9e30ecffc4b}">
+        <p14:section name="Apertura" id="{951cbee7-304b-e2a7-a8f1-0dde723b5d6d}">
           <p14:sldIdLst>
             <p14:sldId id="256"/>
             <p14:sldId id="257"/>
           </p14:sldIdLst>
         </p14:section>
-        <p14:section name="Riscaldamento sulla macchina" id="{6799ff4a-8513-5671-0601-edb2431885fc}">
+        <p14:section name="Riscaldamento sulla macchina" id="{238dc91e-642f-e041-dfa7-640897c0c2a9}">
           <p14:sldIdLst>
             <p14:sldId id="258"/>
           </p14:sldIdLst>
         </p14:section>
-        <p14:section name="Processori superscalari" id="{b15cc0fc-e92e-3c3e-b4b3-5b48553179a2}">
+        <p14:section name="Processori superscalari" id="{75bb35af-6b06-2c93-14cc-4faa1806b430}">
           <p14:sldIdLst>
             <p14:sldId id="259"/>
             <p14:sldId id="260"/>
           </p14:sldIdLst>
         </p14:section>
-        <p14:section name="Vettori: un'istruzione, molti dati" id="{4e4e8b0a-1a53-bdd3-47b5-4af5833b03b6}">
+        <p14:section name="Vettori: un'istruzione, molti dati" id="{b41993c6-f2c8-edfe-e368-2388e65aaa84}">
           <p14:sldIdLst>
             <p14:sldId id="261"/>
             <p14:sldId id="262"/>
           </p14:sldIdLst>
         </p14:section>
-        <p14:section name="Acceleratori GPU" id="{07c8066c-dbba-5011-f484-69af17887553}">
+        <p14:section name="Acceleratori GPU" id="{8a3a3541-d12c-0bdd-807b-d528d8cf82ee}">
           <p14:sldIdLst>
             <p14:sldId id="263"/>
           </p14:sldIdLst>
         </p14:section>
-        <p14:section name="Acceleratori FPGA" id="{333a6a4d-2665-72bb-6ca7-b9275299490b}">
+        <p14:section name="Acceleratori FPGA" id="{84a8eb24-116d-0be6-2a72-ac06e5f282ef}">
           <p14:sldIdLst>
             <p14:sldId id="264"/>
           </p14:sldIdLst>
         </p14:section>
-        <p14:section name="Ritorno alla macchina" id="{bd481760-cc82-fa61-b492-558893f73f5c}">
+        <p14:section name="Ritorno alla macchina" id="{6575e38d-0e06-1a07-86a3-fc7a9f7b887a}">
           <p14:sldIdLst>
             <p14:sldId id="265"/>
           </p14:sldIdLst>
         </p14:section>
-        <p14:section name="Il programma completo" id="{77c499fe-aa8a-742f-23b9-b56060e8fdbb}">
+        <p14:section name="Il programma completo" id="{9db4f4d5-686c-a229-2ef6-6a53bf778fc9}">
           <p14:sldIdLst>
             <p14:sldId id="266"/>
             <p14:sldId id="267"/>
@@ -173,7 +173,7 @@
             <p14:sldId id="269"/>
           </p14:sldIdLst>
         </p14:section>
-        <p14:section name="Eseguire e provare" id="{f64f3bc6-1155-f388-d6ac-7a7414954cdc}">
+        <p14:section name="Eseguire e provare" id="{70e466c7-645c-07a3-6d49-87ff1a2bb2bc}">
           <p14:sldIdLst>
             <p14:sldId id="270"/>
             <p14:sldId id="271"/>
@@ -183,7 +183,7 @@
             <p14:sldId id="275"/>
           </p14:sldIdLst>
         </p14:section>
-        <p14:section name="Esercizi" id="{a2343900-0a5f-e989-9ef8-4b15c139f912}">
+        <p14:section name="Esercizi" id="{5e62fae0-b2fd-da40-6ffb-22157c350fbe}">
           <p14:sldIdLst>
             <p14:sldId id="276"/>
           </p14:sldIdLst>
@@ -594,7 +594,8 @@
               <a:rPr lang="en-US" dirty="0"/>
               <a:t>Questa è la presentazione del codice della Lezione 24. Mentre la presentazione della lezione sviluppa i concetti, questa raccoglie tutto ciò che si scrive e si esegue: ogni listato con il suo commento, il programma completo della lezione, il risultato che deve produrre, e la procedura per provarlo su ciascuno dei tre host. Le due presentazioni vanno lette insieme: i concetti spiegano il codice, e il codice dà ai concetti una conseguenza osservabile.
 Stato di apprendimento: DA COMPRENDERE OGGI, alla fine di questa lezione lo spiegate, lo seguite passo passo e lo applicate da soli; DA UTILIZZARE OGGI, oggi seguite e usate la ricetta; come funziona dentro si spiega più avanti, o non fa parte del corso; DA COMPRENDERE PIÙ AVANTI, riconoscete il nome e lo scopo; lo spiega una lezione successiva. Una slide senza etichetta è contesto: una storia, un esempio, una domanda, un esercizio.
-Stato di apprendimento di questa lezione. DA COMPRENDERE OGGI: l'equazione delle prestazioni; i processori superscalari; le istruzioni vettoriali; HPC e legge di Amdahl; acceleratori GPU e FPGA. DA UTILIZZARE OGGI: il programma completo, gli strumenti di PRG32 (si usa, non si studia, in questo corso). DA COMPRENDERE PIÙ AVANTI: niente. Una slide senza etichetta è contesto: una storia, un esempio, una domanda, un esercizio.</a:t>
+Stato di apprendimento di questa lezione. DA COMPRENDERE OGGI: l'equazione delle prestazioni; i processori superscalari; le istruzioni vettoriali; HPC e legge di Amdahl; acceleratori GPU e FPGA. DA UTILIZZARE OGGI: il programma completo, gli strumenti di PRG32 (si usa, non si studia, in questo corso). DA COMPRENDERE PIÙ AVANTI: niente. Una slide senza etichetta è contesto: una storia, un esempio, una domanda, un esercizio.
+Percorso. I risultati di oggi: (1) usare l'equazione delle prestazioni per dire dove va il tempo; (2) spiegare esecuzione superscalare, vettori, GPU e FPGA come risposte a essa; (3) limitare l'accelerazione parallela con la legge di Amdahl. Si appoggia su: solo ciò che ha preparato la Lezione 01. È l'ultima lezione del corso.</a:t>
             </a:r>
             <a:endParaRPr lang="en-US" dirty="0"/>
           </a:p>
